--- a/Lectures/Snakemake-training-2025.pptx
+++ b/Lectures/Snakemake-training-2025.pptx
@@ -212,7 +212,7 @@
           <a:p>
             <a:fld id="{A286B1AF-B28E-A04D-8142-B9CFB820098A}" type="datetimeFigureOut">
               <a:rPr lang="en-GB" smtClean="0"/>
-              <a:t>25/05/2026</a:t>
+              <a:t>26/05/2026</a:t>
             </a:fld>
             <a:endParaRPr lang="en-GB"/>
           </a:p>
@@ -2282,7 +2282,7 @@
           <a:p>
             <a:fld id="{1FA6F328-A7B8-164D-9A78-5CD81919BAFF}" type="datetimeFigureOut">
               <a:rPr lang="en-GB" smtClean="0"/>
-              <a:t>25/05/2026</a:t>
+              <a:t>26/05/2026</a:t>
             </a:fld>
             <a:endParaRPr lang="en-GB"/>
           </a:p>
@@ -2480,7 +2480,7 @@
           <a:p>
             <a:fld id="{1FA6F328-A7B8-164D-9A78-5CD81919BAFF}" type="datetimeFigureOut">
               <a:rPr lang="en-GB" smtClean="0"/>
-              <a:t>25/05/2026</a:t>
+              <a:t>26/05/2026</a:t>
             </a:fld>
             <a:endParaRPr lang="en-GB"/>
           </a:p>
@@ -2688,7 +2688,7 @@
           <a:p>
             <a:fld id="{1FA6F328-A7B8-164D-9A78-5CD81919BAFF}" type="datetimeFigureOut">
               <a:rPr lang="en-GB" smtClean="0"/>
-              <a:t>25/05/2026</a:t>
+              <a:t>26/05/2026</a:t>
             </a:fld>
             <a:endParaRPr lang="en-GB"/>
           </a:p>
@@ -2886,7 +2886,7 @@
           <a:p>
             <a:fld id="{1FA6F328-A7B8-164D-9A78-5CD81919BAFF}" type="datetimeFigureOut">
               <a:rPr lang="en-GB" smtClean="0"/>
-              <a:t>25/05/2026</a:t>
+              <a:t>26/05/2026</a:t>
             </a:fld>
             <a:endParaRPr lang="en-GB"/>
           </a:p>
@@ -3161,7 +3161,7 @@
           <a:p>
             <a:fld id="{1FA6F328-A7B8-164D-9A78-5CD81919BAFF}" type="datetimeFigureOut">
               <a:rPr lang="en-GB" smtClean="0"/>
-              <a:t>25/05/2026</a:t>
+              <a:t>26/05/2026</a:t>
             </a:fld>
             <a:endParaRPr lang="en-GB"/>
           </a:p>
@@ -3426,7 +3426,7 @@
           <a:p>
             <a:fld id="{1FA6F328-A7B8-164D-9A78-5CD81919BAFF}" type="datetimeFigureOut">
               <a:rPr lang="en-GB" smtClean="0"/>
-              <a:t>25/05/2026</a:t>
+              <a:t>26/05/2026</a:t>
             </a:fld>
             <a:endParaRPr lang="en-GB"/>
           </a:p>
@@ -3838,7 +3838,7 @@
           <a:p>
             <a:fld id="{1FA6F328-A7B8-164D-9A78-5CD81919BAFF}" type="datetimeFigureOut">
               <a:rPr lang="en-GB" smtClean="0"/>
-              <a:t>25/05/2026</a:t>
+              <a:t>26/05/2026</a:t>
             </a:fld>
             <a:endParaRPr lang="en-GB"/>
           </a:p>
@@ -3979,7 +3979,7 @@
           <a:p>
             <a:fld id="{1FA6F328-A7B8-164D-9A78-5CD81919BAFF}" type="datetimeFigureOut">
               <a:rPr lang="en-GB" smtClean="0"/>
-              <a:t>25/05/2026</a:t>
+              <a:t>26/05/2026</a:t>
             </a:fld>
             <a:endParaRPr lang="en-GB"/>
           </a:p>
@@ -4092,7 +4092,7 @@
           <a:p>
             <a:fld id="{1FA6F328-A7B8-164D-9A78-5CD81919BAFF}" type="datetimeFigureOut">
               <a:rPr lang="en-GB" smtClean="0"/>
-              <a:t>25/05/2026</a:t>
+              <a:t>26/05/2026</a:t>
             </a:fld>
             <a:endParaRPr lang="en-GB"/>
           </a:p>
@@ -4403,7 +4403,7 @@
           <a:p>
             <a:fld id="{1FA6F328-A7B8-164D-9A78-5CD81919BAFF}" type="datetimeFigureOut">
               <a:rPr lang="en-GB" smtClean="0"/>
-              <a:t>25/05/2026</a:t>
+              <a:t>26/05/2026</a:t>
             </a:fld>
             <a:endParaRPr lang="en-GB"/>
           </a:p>
@@ -4691,7 +4691,7 @@
           <a:p>
             <a:fld id="{1FA6F328-A7B8-164D-9A78-5CD81919BAFF}" type="datetimeFigureOut">
               <a:rPr lang="en-GB" smtClean="0"/>
-              <a:t>25/05/2026</a:t>
+              <a:t>26/05/2026</a:t>
             </a:fld>
             <a:endParaRPr lang="en-GB"/>
           </a:p>
@@ -4932,7 +4932,7 @@
           <a:p>
             <a:fld id="{1FA6F328-A7B8-164D-9A78-5CD81919BAFF}" type="datetimeFigureOut">
               <a:rPr lang="en-GB" smtClean="0"/>
-              <a:t>25/05/2026</a:t>
+              <a:t>26/05/2026</a:t>
             </a:fld>
             <a:endParaRPr lang="en-GB"/>
           </a:p>
@@ -5857,7 +5857,7 @@
           <a:p>
             <a:r>
               <a:rPr lang="en-GB" dirty="0"/>
-              <a:t>rule selection</a:t>
+              <a:t>rule selection:</a:t>
             </a:r>
           </a:p>
           <a:p>
@@ -6003,7 +6003,7 @@
         <p:spPr>
           <a:xfrm>
             <a:off x="5843617" y="120605"/>
-            <a:ext cx="6251755" cy="3448991"/>
+            <a:ext cx="6251755" cy="5632311"/>
           </a:xfrm>
           <a:prstGeom prst="rect">
             <a:avLst/>
@@ -6232,8 +6232,8 @@
         </p:nvCxnSpPr>
         <p:spPr>
           <a:xfrm flipV="1">
-            <a:off x="4699235" y="1845101"/>
-            <a:ext cx="1144382" cy="3102632"/>
+            <a:off x="4699235" y="2936761"/>
+            <a:ext cx="1144382" cy="2010972"/>
           </a:xfrm>
           <a:prstGeom prst="bentConnector3">
             <a:avLst/>
@@ -14394,7 +14394,7 @@
         <p:spPr>
           <a:xfrm>
             <a:off x="5529944" y="2470243"/>
-            <a:ext cx="6727370" cy="3139321"/>
+            <a:ext cx="6727370" cy="2862322"/>
           </a:xfrm>
           <a:prstGeom prst="rect">
             <a:avLst/>
@@ -14421,35 +14421,8 @@
           <a:p>
             <a:r>
               <a:rPr lang="en-GB" dirty="0"/>
-              <a:t>        expand("plot/{sample}.{</a:t>
-            </a:r>
-            <a:r>
-              <a:rPr lang="en-GB" dirty="0" err="1"/>
-              <a:t>ext</a:t>
-            </a:r>
-            <a:r>
-              <a:rPr lang="en-GB" dirty="0"/>
-              <a:t>}", zip, sample=samples, </a:t>
-            </a:r>
-            <a:r>
-              <a:rPr lang="en-GB" dirty="0" err="1"/>
-              <a:t>ext</a:t>
-            </a:r>
-            <a:r>
-              <a:rPr lang="en-GB" dirty="0"/>
-              <a:t>=</a:t>
-            </a:r>
-            <a:r>
-              <a:rPr lang="en-GB" dirty="0" err="1"/>
-              <a:t>exts</a:t>
-            </a:r>
-            <a:r>
-              <a:rPr lang="en-GB" dirty="0"/>
-              <a:t>)</a:t>
-            </a:r>
-          </a:p>
-          <a:p>
-            <a:endParaRPr lang="en-GB" dirty="0"/>
+              <a:t>        output</a:t>
+            </a:r>
           </a:p>
           <a:p>
             <a:r>
@@ -15222,7 +15195,7 @@
         <p:spPr>
           <a:xfrm>
             <a:off x="5941434" y="127077"/>
-            <a:ext cx="5971604" cy="3416320"/>
+            <a:ext cx="5971604" cy="3139321"/>
           </a:xfrm>
           <a:prstGeom prst="rect">
             <a:avLst/>
@@ -15249,31 +15222,7 @@
           <a:p>
             <a:r>
               <a:rPr lang="en-GB" dirty="0"/>
-              <a:t>        expand("plot/{sample}.{</a:t>
-            </a:r>
-            <a:r>
-              <a:rPr lang="en-GB" dirty="0" err="1"/>
-              <a:t>ext</a:t>
-            </a:r>
-            <a:r>
-              <a:rPr lang="en-GB" dirty="0"/>
-              <a:t>}", zip, sample=samples, </a:t>
-            </a:r>
-            <a:r>
-              <a:rPr lang="en-GB" dirty="0" err="1"/>
-              <a:t>ext</a:t>
-            </a:r>
-            <a:r>
-              <a:rPr lang="en-GB" dirty="0"/>
-              <a:t>=</a:t>
-            </a:r>
-            <a:r>
-              <a:rPr lang="en-GB" dirty="0" err="1"/>
-              <a:t>exts</a:t>
-            </a:r>
-            <a:r>
-              <a:rPr lang="en-GB" dirty="0"/>
-              <a:t>)</a:t>
+              <a:t>        output</a:t>
             </a:r>
           </a:p>
           <a:p>
